--- a/data-eng/decks/w1d5s1.pptx
+++ b/data-eng/decks/w1d5s1.pptx
@@ -7534,7 +7534,7 @@
                 <a:ea typeface="Pretendard"/>
                 <a:cs typeface="Pretendard"/>
               </a:rPr>
-              <a:t>숫자로 시작하거나 콜론이 든 값 — "8081:80" 은 따옴표 없이는 시각처럼 해석될 수 있다</a:t>
+              <a:t>숫자로 시작하거나 콜론이 든 값 — "8081:80" 은 따옴표 없이는 60진수 숫자로 읽힐 수 있다</a:t>
             </a:r>
           </a:p>
         </p:txBody>

--- a/data-eng/decks/w1d5s1.pptx
+++ b/data-eng/decks/w1d5s1.pptx
@@ -4381,7 +4381,7 @@
                 <a:ea typeface="Pretendard"/>
                 <a:cs typeface="Pretendard"/>
               </a:rPr>
-              <a:t>1-4 의 app 폴더 · pg 컨테이너 정지</a:t>
+              <a:t>「실습점검 · 환경재설정」 1~5단계</a:t>
             </a:r>
           </a:p>
         </p:txBody>
